--- a/tpt/014-dmp2-billboard-top-10/billboard-top-10-intro-deck.pptx
+++ b/tpt/014-dmp2-billboard-top-10/billboard-top-10-intro-deck.pptx
@@ -798,7 +798,7 @@
           <a:lstStyle/>
           <a:p>
             <a:r>
-              <a:t>Class 6, final mix and bounce. Step 6 of the sheet, word by word on the slide. My notes warn that students copy the arrangement but ignore the mix, and the EQ and panning step often gets skipped, so make it visible: ask every student to show you one EQ and one pan change before they bounce.</a:t>
+              <a:t>Class 6, final mix and bounce. The four parts of step 6 of the sheet, shortened to fit the slide; the full step is on the project sheet. My notes warn that students copy the arrangement but ignore the mix, and the EQ and panning step often gets skipped, so make it visible: ask every student to show you one EQ and one pan change before they bounce.</a:t>
             </a:r>
           </a:p>
         </p:txBody>

--- a/tpt/014-dmp2-billboard-top-10/billboard-top-10-intro-deck.pptx
+++ b/tpt/014-dmp2-billboard-top-10/billboard-top-10-intro-deck.pptx
@@ -1078,7 +1078,7 @@
           <a:lstStyle/>
           <a:p>
             <a:r>
-              <a:t>Close with what my teacher notes say this project does: it teaches students to listen analytically rather than passively. They matched a real hit’s tempo, form and instrumentation with precision, and still made creative production choices of their own. That is how producers learn.</a:t>
+              <a:t>Close with what my teacher notes say this project does: it teaches students to listen analytically rather than passively. They matched a real hit’s tempo, form and instrumentation with precision, and still made creative production choices of their own. That is how producers learn. Reflection: point students to the Reflection page. A reflection is a written or oral conversation about how they did on the project and what they would do differently next time; they choose to write it or to talk it through with you.</a:t>
             </a:r>
           </a:p>
         </p:txBody>
@@ -10973,6 +10973,120 @@
           </a:prstGeom>
         </p:spPr>
       </p:pic>
+      <p:sp>
+        <p:nvSpPr>
+          <p:cNvPr id="19" name="Rounded Rectangle 18"/>
+          <p:cNvSpPr/>
+          <p:nvPr/>
+        </p:nvSpPr>
+        <p:spPr>
+          <a:xfrm>
+            <a:off x="548640" y="5349240"/>
+            <a:ext cx="5852160" cy="960120"/>
+          </a:xfrm>
+          <a:prstGeom prst="roundRect">
+            <a:avLst/>
+          </a:prstGeom>
+          <a:solidFill>
+            <a:srgbClr val="B0127A"/>
+          </a:solidFill>
+          <a:ln>
+            <a:noFill/>
+          </a:ln>
+          <a:effectLst/>
+        </p:spPr>
+        <p:style>
+          <a:lnRef idx="1">
+            <a:schemeClr val="accent1"/>
+          </a:lnRef>
+          <a:fillRef idx="3">
+            <a:schemeClr val="accent1"/>
+          </a:fillRef>
+          <a:effectRef idx="2">
+            <a:schemeClr val="accent1"/>
+          </a:effectRef>
+          <a:fontRef idx="minor">
+            <a:schemeClr val="lt1"/>
+          </a:fontRef>
+        </p:style>
+        <p:txBody>
+          <a:bodyPr rtlCol="0" anchor="ctr"/>
+          <a:lstStyle/>
+          <a:p>
+            <a:pPr algn="ctr"/>
+          </a:p>
+        </p:txBody>
+      </p:sp>
+      <p:sp>
+        <p:nvSpPr>
+          <p:cNvPr id="20" name="TextBox 19"/>
+          <p:cNvSpPr txBox="1"/>
+          <p:nvPr/>
+        </p:nvSpPr>
+        <p:spPr>
+          <a:xfrm>
+            <a:off x="731520" y="5394960"/>
+            <a:ext cx="5486400" cy="365760"/>
+          </a:xfrm>
+          <a:prstGeom prst="rect">
+            <a:avLst/>
+          </a:prstGeom>
+          <a:noFill/>
+        </p:spPr>
+        <p:txBody>
+          <a:bodyPr wrap="square" anchor="t" lIns="36576" rIns="36576" tIns="18288" bIns="18288">
+            <a:spAutoFit/>
+          </a:bodyPr>
+          <a:lstStyle/>
+          <a:p>
+            <a:pPr algn="l"/>
+            <a:r>
+              <a:rPr sz="2000" b="1">
+                <a:solidFill>
+                  <a:srgbClr val="FFFFFF"/>
+                </a:solidFill>
+                <a:latin typeface="Oswald"/>
+              </a:rPr>
+              <a:t>REFLECTION · PAGE 20</a:t>
+            </a:r>
+          </a:p>
+        </p:txBody>
+      </p:sp>
+      <p:sp>
+        <p:nvSpPr>
+          <p:cNvPr id="21" name="TextBox 20"/>
+          <p:cNvSpPr txBox="1"/>
+          <p:nvPr/>
+        </p:nvSpPr>
+        <p:spPr>
+          <a:xfrm>
+            <a:off x="731520" y="5760720"/>
+            <a:ext cx="5486400" cy="502920"/>
+          </a:xfrm>
+          <a:prstGeom prst="rect">
+            <a:avLst/>
+          </a:prstGeom>
+          <a:noFill/>
+        </p:spPr>
+        <p:txBody>
+          <a:bodyPr wrap="square" anchor="t" lIns="36576" rIns="36576" tIns="18288" bIns="18288">
+            <a:spAutoFit/>
+          </a:bodyPr>
+          <a:lstStyle/>
+          <a:p>
+            <a:pPr algn="l"/>
+            <a:r>
+              <a:rPr sz="1500" b="0">
+                <a:solidFill>
+                  <a:srgbClr val="FFFFFF"/>
+                </a:solidFill>
+                <a:latin typeface="Source Sans 3"/>
+              </a:rPr>
+              <a:t>Write it or talk it through: what went well, what was hard, what you would change.</a:t>
+            </a:r>
+          </a:p>
+        </p:txBody>
+      </p:sp>
     </p:spTree>
   </p:cSld>
   <p:clrMapOvr>
